--- a/presentations/signatif-intro.pptx
+++ b/presentations/signatif-intro.pptx
@@ -7816,7 +7816,7 @@
                 </a:solidFill>
                 <a:latin typeface="Calibri"/>
               </a:rPr>
-              <a:t>SIGNATIF is a CalConnect work item, drafted as an ISO/TC 154 working draft — 21 normative clauses, 8 annexes, open source on GitHub.</a:t>
+              <a:t>SIGNATIF is a CalConnect work item, drafted as an ISO/TC 154 working draft — 20 normative clauses, 8 annexes, open source on GitHub.</a:t>
             </a:r>
           </a:p>
         </p:txBody>

--- a/presentations/signatif-intro.pptx
+++ b/presentations/signatif-intro.pptx
@@ -7177,7 +7177,7 @@
                 </a:solidFill>
                 <a:latin typeface="Archivo"/>
               </a:rPr>
-              <a:t>113</a:t>
+              <a:t>116</a:t>
             </a:r>
           </a:p>
         </p:txBody>
@@ -7255,7 +7255,7 @@
                 </a:solidFill>
                 <a:latin typeface="Archivo"/>
               </a:rPr>
-              <a:t>113</a:t>
+              <a:t>116</a:t>
             </a:r>
           </a:p>
         </p:txBody>

--- a/presentations/signatif-intro.pptx
+++ b/presentations/signatif-intro.pptx
@@ -5065,7 +5065,7 @@
                           </a:solidFill>
                           <a:latin typeface="Calibri"/>
                         </a:rPr>
-                        <a:t>Binary</a:t>
+                        <a:t>Policy classes at best</a:t>
                       </a:r>
                     </a:p>
                   </a:txBody>

--- a/presentations/signatif-intro.pptx
+++ b/presentations/signatif-intro.pptx
@@ -3971,7 +3971,7 @@
                           </a:solidFill>
                           <a:latin typeface="Calibri"/>
                         </a:rPr>
-                        <a:t>None — membership</a:t>
+                        <a:t>Out of scope — membership model</a:t>
                       </a:r>
                     </a:p>
                   </a:txBody>
@@ -4627,7 +4627,7 @@
                           </a:solidFill>
                           <a:latin typeface="Calibri"/>
                         </a:rPr>
-                        <a:t>None — append-only</a:t>
+                        <a:t>Out of scope — append-only</a:t>
                       </a:r>
                     </a:p>
                   </a:txBody>
@@ -4737,7 +4737,7 @@
                           </a:solidFill>
                           <a:latin typeface="Calibri"/>
                         </a:rPr>
-                        <a:t>Awkward, freshness-bound</a:t>
+                        <a:t>Freshness-sensitive; not the design case</a:t>
                       </a:r>
                     </a:p>
                   </a:txBody>
@@ -4764,7 +4764,7 @@
                           </a:solidFill>
                           <a:latin typeface="Calibri"/>
                         </a:rPr>
-                        <a:t>Not the model</a:t>
+                        <a:t>Not the design case</a:t>
                       </a:r>
                     </a:p>
                   </a:txBody>
@@ -4791,7 +4791,7 @@
                           </a:solidFill>
                           <a:latin typeface="Calibri"/>
                         </a:rPr>
-                        <a:t>No — needs the chain</a:t>
+                        <a:t>Requires the chain</a:t>
                       </a:r>
                     </a:p>
                   </a:txBody>
@@ -10421,7 +10421,7 @@
                 </a:solidFill>
                 <a:latin typeface="Archivo"/>
               </a:rPr>
-              <a:t>No existing standard makes artifact trust computable</a:t>
+              <a:t>No existing framework combines all of these properties</a:t>
             </a:r>
           </a:p>
         </p:txBody>

--- a/presentations/signatif-intro.pptx
+++ b/presentations/signatif-intro.pptx
@@ -7177,7 +7177,7 @@
                 </a:solidFill>
                 <a:latin typeface="Archivo"/>
               </a:rPr>
-              <a:t>116</a:t>
+              <a:t>117</a:t>
             </a:r>
           </a:p>
         </p:txBody>
@@ -7255,7 +7255,7 @@
                 </a:solidFill>
                 <a:latin typeface="Archivo"/>
               </a:rPr>
-              <a:t>116</a:t>
+              <a:t>117</a:t>
             </a:r>
           </a:p>
         </p:txBody>

--- a/presentations/signatif-intro.pptx
+++ b/presentations/signatif-intro.pptx
@@ -7177,7 +7177,7 @@
                 </a:solidFill>
                 <a:latin typeface="Archivo"/>
               </a:rPr>
-              <a:t>117</a:t>
+              <a:t>118</a:t>
             </a:r>
           </a:p>
         </p:txBody>
@@ -7255,7 +7255,7 @@
                 </a:solidFill>
                 <a:latin typeface="Archivo"/>
               </a:rPr>
-              <a:t>117</a:t>
+              <a:t>118</a:t>
             </a:r>
           </a:p>
         </p:txBody>
